--- a/workflow_figures/Vincent_wheat-proteogenomics_technical-note_2026-06-01_figures.pptx
+++ b/workflow_figures/Vincent_wheat-proteogenomics_technical-note_2026-06-01_figures.pptx
@@ -11889,7 +11889,7 @@
         <p:spPr>
           <a:xfrm>
             <a:off x="0" y="0"/>
-            <a:ext cx="6858000" cy="707886"/>
+            <a:ext cx="6858000" cy="1169551"/>
           </a:xfrm>
           <a:prstGeom prst="rect">
             <a:avLst/>
@@ -11907,19 +11907,18 @@
               <a:t>Supplementary Figure S2: </a:t>
             </a:r>
             <a:r>
-              <a:rPr lang="en-US" sz="1000" dirty="0"/>
-              <a:t>Peptide support distributions across HC and LC wheat gene models. (A) Scatterplot showing the relationship between protein length and the number of projected unique peptides per protein isoform. (B) Boxplot comparing projected peptide support between HC and LC gene models. (C) Distribution of projected unique peptides per gene model showing broader and more abundant support for HC annotations.</a:t>
+              <a:rPr lang="en-AU" sz="1000" dirty="0"/>
+              <a:t>Peptide support distributions across HC and LC wheat gene models. (A) Scatterplot showing the relationship between protein length and the number of projected unique peptides per protein isoform, separated by HC and LC annotation confidence. (B) Boxplot comparing projected peptide support between HC and LC gene models. (C) Distribution of projected unique peptides per gene model showing broader and more abundant support for HC annotations. (D) Proportion of non-redundant validated peptide projections assigned to HC and LC gene models. (E) Proportion of HC peptide projections classified as within-exon or exon-spanning. (F) Proportion of LC peptide projections classified as within-exon or exon-spanning.</a:t>
             </a:r>
-            <a:endParaRPr lang="en-AU" sz="1000" dirty="0"/>
           </a:p>
         </p:txBody>
       </p:sp>
       <p:grpSp>
         <p:nvGrpSpPr>
-          <p:cNvPr id="20" name="Group 19">
+          <p:cNvPr id="25" name="Group 24">
             <a:extLst>
               <a:ext uri="{FF2B5EF4-FFF2-40B4-BE49-F238E27FC236}">
-                <a16:creationId xmlns:a16="http://schemas.microsoft.com/office/drawing/2014/main" id="{9605ECED-AEE4-7803-C9C1-BF3B9A50B71D}"/>
+                <a16:creationId xmlns:a16="http://schemas.microsoft.com/office/drawing/2014/main" id="{84EEC60A-7752-BA49-9A8E-124790821C77}"/>
               </a:ext>
             </a:extLst>
           </p:cNvPr>
@@ -11928,10 +11927,10 @@
         </p:nvGrpSpPr>
         <p:grpSpPr>
           <a:xfrm>
-            <a:off x="0" y="673642"/>
-            <a:ext cx="6827520" cy="7162478"/>
-            <a:chOff x="0" y="673642"/>
-            <a:chExt cx="6827520" cy="7162478"/>
+            <a:off x="0" y="1094750"/>
+            <a:ext cx="6827520" cy="8754100"/>
+            <a:chOff x="0" y="1094750"/>
+            <a:chExt cx="6827520" cy="8754100"/>
           </a:xfrm>
         </p:grpSpPr>
         <p:pic>
@@ -11963,7 +11962,7 @@
           </p:blipFill>
           <p:spPr>
             <a:xfrm>
-              <a:off x="167712" y="769959"/>
+              <a:off x="167712" y="1191067"/>
               <a:ext cx="4446795" cy="3219771"/>
             </a:xfrm>
             <a:prstGeom prst="rect">
@@ -12000,7 +11999,7 @@
           </p:blipFill>
           <p:spPr>
             <a:xfrm>
-              <a:off x="4702626" y="786665"/>
+              <a:off x="4702626" y="1207773"/>
               <a:ext cx="2111992" cy="3253461"/>
             </a:xfrm>
             <a:prstGeom prst="rect">
@@ -12037,8 +12036,8 @@
           </p:blipFill>
           <p:spPr>
             <a:xfrm>
-              <a:off x="0" y="4139680"/>
-              <a:ext cx="6827520" cy="3696440"/>
+              <a:off x="0" y="4464536"/>
+              <a:ext cx="6827520" cy="3418969"/>
             </a:xfrm>
             <a:prstGeom prst="rect">
               <a:avLst/>
@@ -12059,7 +12058,7 @@
           </p:nvSpPr>
           <p:spPr>
             <a:xfrm>
-              <a:off x="0" y="673642"/>
+              <a:off x="0" y="1094750"/>
               <a:ext cx="473528" cy="461665"/>
             </a:xfrm>
             <a:prstGeom prst="rect">
@@ -12095,7 +12094,7 @@
           </p:nvSpPr>
           <p:spPr>
             <a:xfrm>
-              <a:off x="4606287" y="673642"/>
+              <a:off x="4606287" y="1094750"/>
               <a:ext cx="465833" cy="461665"/>
             </a:xfrm>
             <a:prstGeom prst="rect">
@@ -12131,7 +12130,7 @@
           </p:nvSpPr>
           <p:spPr>
             <a:xfrm>
-              <a:off x="0" y="4060518"/>
+              <a:off x="0" y="4385374"/>
               <a:ext cx="492186" cy="461665"/>
             </a:xfrm>
             <a:prstGeom prst="rect">
@@ -12148,6 +12147,151 @@
               <a:r>
                 <a:rPr lang="en-US" sz="2400" b="1" dirty="0"/>
                 <a:t>C.</a:t>
+              </a:r>
+              <a:endParaRPr lang="en-AU" sz="2400" b="1" dirty="0"/>
+            </a:p>
+          </p:txBody>
+        </p:sp>
+        <p:pic>
+          <p:nvPicPr>
+            <p:cNvPr id="21" name="Picture 20">
+              <a:extLst>
+                <a:ext uri="{FF2B5EF4-FFF2-40B4-BE49-F238E27FC236}">
+                  <a16:creationId xmlns:a16="http://schemas.microsoft.com/office/drawing/2014/main" id="{F3E7D19C-2996-4650-3294-36AEED46A7FD}"/>
+                </a:ext>
+              </a:extLst>
+            </p:cNvPr>
+            <p:cNvPicPr>
+              <a:picLocks noChangeAspect="1"/>
+            </p:cNvPicPr>
+            <p:nvPr/>
+          </p:nvPicPr>
+          <p:blipFill>
+            <a:blip r:embed="rId5">
+              <a:extLst>
+                <a:ext uri="{28A0092B-C50C-407E-A947-70E740481C1C}">
+                  <a14:useLocalDpi xmlns:a14="http://schemas.microsoft.com/office/drawing/2010/main" val="0"/>
+                </a:ext>
+              </a:extLst>
+            </a:blip>
+            <a:srcRect l="7719" t="19902" r="7544" b="8973"/>
+            <a:stretch>
+              <a:fillRect/>
+            </a:stretch>
+          </p:blipFill>
+          <p:spPr>
+            <a:xfrm>
+              <a:off x="297982" y="7928920"/>
+              <a:ext cx="6262036" cy="1919930"/>
+            </a:xfrm>
+            <a:prstGeom prst="rect">
+              <a:avLst/>
+            </a:prstGeom>
+          </p:spPr>
+        </p:pic>
+        <p:sp>
+          <p:nvSpPr>
+            <p:cNvPr id="22" name="TextBox 21">
+              <a:extLst>
+                <a:ext uri="{FF2B5EF4-FFF2-40B4-BE49-F238E27FC236}">
+                  <a16:creationId xmlns:a16="http://schemas.microsoft.com/office/drawing/2014/main" id="{3AECDE2B-A8F1-E7D4-1B60-1CDD6210A7EB}"/>
+                </a:ext>
+              </a:extLst>
+            </p:cNvPr>
+            <p:cNvSpPr txBox="1"/>
+            <p:nvPr/>
+          </p:nvSpPr>
+          <p:spPr>
+            <a:xfrm>
+              <a:off x="8220" y="7808597"/>
+              <a:ext cx="485582" cy="461665"/>
+            </a:xfrm>
+            <a:prstGeom prst="rect">
+              <a:avLst/>
+            </a:prstGeom>
+            <a:noFill/>
+          </p:spPr>
+          <p:txBody>
+            <a:bodyPr wrap="none" rtlCol="0">
+              <a:spAutoFit/>
+            </a:bodyPr>
+            <a:lstStyle/>
+            <a:p>
+              <a:r>
+                <a:rPr lang="en-US" sz="2400" b="1" dirty="0"/>
+                <a:t>D.</a:t>
+              </a:r>
+              <a:endParaRPr lang="en-AU" sz="2400" b="1" dirty="0"/>
+            </a:p>
+          </p:txBody>
+        </p:sp>
+        <p:sp>
+          <p:nvSpPr>
+            <p:cNvPr id="23" name="TextBox 22">
+              <a:extLst>
+                <a:ext uri="{FF2B5EF4-FFF2-40B4-BE49-F238E27FC236}">
+                  <a16:creationId xmlns:a16="http://schemas.microsoft.com/office/drawing/2014/main" id="{D2B010B1-34DA-9AF6-75B6-0374E3049B45}"/>
+                </a:ext>
+              </a:extLst>
+            </p:cNvPr>
+            <p:cNvSpPr txBox="1"/>
+            <p:nvPr/>
+          </p:nvSpPr>
+          <p:spPr>
+            <a:xfrm>
+              <a:off x="2464913" y="7808597"/>
+              <a:ext cx="453970" cy="461665"/>
+            </a:xfrm>
+            <a:prstGeom prst="rect">
+              <a:avLst/>
+            </a:prstGeom>
+            <a:noFill/>
+          </p:spPr>
+          <p:txBody>
+            <a:bodyPr wrap="none" rtlCol="0">
+              <a:spAutoFit/>
+            </a:bodyPr>
+            <a:lstStyle/>
+            <a:p>
+              <a:r>
+                <a:rPr lang="en-US" sz="2400" b="1" dirty="0"/>
+                <a:t>E.</a:t>
+              </a:r>
+              <a:endParaRPr lang="en-AU" sz="2400" b="1" dirty="0"/>
+            </a:p>
+          </p:txBody>
+        </p:sp>
+        <p:sp>
+          <p:nvSpPr>
+            <p:cNvPr id="24" name="TextBox 23">
+              <a:extLst>
+                <a:ext uri="{FF2B5EF4-FFF2-40B4-BE49-F238E27FC236}">
+                  <a16:creationId xmlns:a16="http://schemas.microsoft.com/office/drawing/2014/main" id="{6DED9421-3393-0CA9-51AA-B131BD642223}"/>
+                </a:ext>
+              </a:extLst>
+            </p:cNvPr>
+            <p:cNvSpPr txBox="1"/>
+            <p:nvPr/>
+          </p:nvSpPr>
+          <p:spPr>
+            <a:xfrm>
+              <a:off x="4738722" y="7808597"/>
+              <a:ext cx="412549" cy="461665"/>
+            </a:xfrm>
+            <a:prstGeom prst="rect">
+              <a:avLst/>
+            </a:prstGeom>
+            <a:noFill/>
+          </p:spPr>
+          <p:txBody>
+            <a:bodyPr wrap="none" rtlCol="0">
+              <a:spAutoFit/>
+            </a:bodyPr>
+            <a:lstStyle/>
+            <a:p>
+              <a:r>
+                <a:rPr lang="en-US" sz="2400" b="1" dirty="0"/>
+                <a:t>F.</a:t>
               </a:r>
               <a:endParaRPr lang="en-AU" sz="2400" b="1" dirty="0"/>
             </a:p>
